--- a/PQ_Report_Generator_Overview_for_Managers_ABL.pptx
+++ b/PQ_Report_Generator_Overview_for_Managers_ABL.pptx
@@ -2619,8 +2619,8 @@
         </p:blipFill>
         <p:spPr>
           <a:xfrm>
-            <a:off x="6766560" y="1188720"/>
-            <a:ext cx="3429521" cy="4846320"/>
+            <a:off x="7589520" y="2606040"/>
+            <a:ext cx="2361840" cy="3337560"/>
           </a:xfrm>
           <a:prstGeom prst="rect">
             <a:avLst/>
@@ -2640,8 +2640,8 @@
         </p:nvSpPr>
         <p:spPr>
           <a:xfrm>
-            <a:off x="6766560" y="6080759"/>
-            <a:ext cx="3429521" cy="365760"/>
+            <a:off x="7589520" y="5989320"/>
+            <a:ext cx="2361840" cy="365760"/>
           </a:xfrm>
           <a:prstGeom prst="rect">
             <a:avLst/>

--- a/PQ_Report_Generator_Overview_for_Managers_ABL.pptx
+++ b/PQ_Report_Generator_Overview_for_Managers_ABL.pptx
@@ -1806,7 +1806,7 @@
                   <a:srgbClr val="01485C"/>
                 </a:solidFill>
               </a:rPr>
-              <a:t>52</a:t>
+              <a:t>54</a:t>
             </a:r>
           </a:p>
         </p:txBody>
@@ -2052,7 +2052,7 @@
                   <a:srgbClr val="01485C"/>
                 </a:solidFill>
               </a:rPr>
-              <a:t>68</a:t>
+              <a:t>70</a:t>
             </a:r>
           </a:p>
         </p:txBody>
@@ -2447,7 +2447,7 @@
                   <a:srgbClr val="17272E"/>
                 </a:solidFill>
               </a:rPr>
-              <a:t>RBWH\   9 documents</a:t>
+              <a:t>RBWH\   10 documents</a:t>
             </a:r>
           </a:p>
           <a:p>
@@ -2530,7 +2530,7 @@
                   <a:srgbClr val="17272E"/>
                 </a:solidFill>
               </a:rPr>
-              <a:t>Mount_Isa\   3 documents</a:t>
+              <a:t>Mount_Isa\   4 documents</a:t>
             </a:r>
           </a:p>
           <a:p>

--- a/PQ_Report_Generator_Overview_for_Managers_ABL.pptx
+++ b/PQ_Report_Generator_Overview_for_Managers_ABL.pptx
@@ -3973,7 +3973,7 @@
         <p:spPr>
           <a:xfrm>
             <a:off x="548640" y="1143000"/>
-            <a:ext cx="7798985" cy="4846320"/>
+            <a:ext cx="6949440" cy="4318409"/>
           </a:xfrm>
           <a:prstGeom prst="rect">
             <a:avLst/>
@@ -3993,8 +3993,8 @@
         </p:nvSpPr>
         <p:spPr>
           <a:xfrm>
-            <a:off x="548640" y="6035040"/>
-            <a:ext cx="7798984" cy="365760"/>
+            <a:off x="548640" y="5507129"/>
+            <a:ext cx="6949440" cy="365760"/>
           </a:xfrm>
           <a:prstGeom prst="rect">
             <a:avLst/>
@@ -4031,8 +4031,8 @@
         </p:nvSpPr>
         <p:spPr>
           <a:xfrm>
-            <a:off x="8667664" y="1188720"/>
-            <a:ext cx="2945215" cy="4846320"/>
+            <a:off x="7818119" y="1188720"/>
+            <a:ext cx="3794760" cy="4846320"/>
           </a:xfrm>
           <a:prstGeom prst="rect">
             <a:avLst/>

--- a/PQ_Report_Generator_Overview_for_Managers_ABL.pptx
+++ b/PQ_Report_Generator_Overview_for_Managers_ABL.pptx
@@ -1182,8 +1182,8 @@
         </p:nvSpPr>
         <p:spPr>
           <a:xfrm>
-            <a:off x="548640" y="6291072"/>
-            <a:ext cx="11064240" cy="320040"/>
+            <a:off x="548640" y="6016752"/>
+            <a:ext cx="11064240" cy="566928"/>
           </a:xfrm>
           <a:prstGeom prst="rect">
             <a:avLst/>
@@ -1210,6 +1210,18 @@
               <a:t>Conceived, designed and built by Craig MacKenzie · Chemistry Department, Townsville Group Laboratory · Pathology Queensland</a:t>
             </a:r>
             <a:endParaRPr lang="en-US" sz="1100" dirty="0"/>
+          </a:p>
+          <a:p>
+            <a:pPr/>
+            <a:r>
+              <a:rPr sz="1000">
+                <a:solidFill>
+                  <a:srgbClr val="6CCAD4"/>
+                </a:solidFill>
+                <a:latin typeface="Calibri"/>
+              </a:rPr>
+              <a:t>Amendments and oversight by Damian Juskiw · Supervising Scientist, Chemical Pathology, Townsville</a:t>
+            </a:r>
           </a:p>
         </p:txBody>
       </p:sp>
@@ -2678,8 +2690,8 @@
         </p:nvSpPr>
         <p:spPr>
           <a:xfrm>
-            <a:off x="548640" y="6263640"/>
-            <a:ext cx="11064240" cy="365760"/>
+            <a:off x="548640" y="6217920"/>
+            <a:ext cx="11064240" cy="548640"/>
           </a:xfrm>
           <a:prstGeom prst="rect">
             <a:avLst/>
@@ -2704,6 +2716,21 @@
                 </a:solidFill>
               </a:rPr>
               <a:t>Conceived, designed and built by Craig MacKenzie · Chemistry Department, Townsville Group Laboratory · Pathology Queensland</a:t>
+            </a:r>
+          </a:p>
+          <a:p>
+            <a:pPr algn="l">
+              <a:spcAft>
+                <a:spcPts val="600"/>
+              </a:spcAft>
+            </a:pPr>
+            <a:r>
+              <a:rPr sz="1000" b="0">
+                <a:solidFill>
+                  <a:srgbClr val="5F7178"/>
+                </a:solidFill>
+              </a:rPr>
+              <a:t>Amendments and oversight by Damian Juskiw · Supervising Scientist, Chemical Pathology, Townsville</a:t>
             </a:r>
           </a:p>
         </p:txBody>
@@ -3179,8 +3206,8 @@
         </p:nvSpPr>
         <p:spPr>
           <a:xfrm>
-            <a:off x="548640" y="6263640"/>
-            <a:ext cx="11064240" cy="365760"/>
+            <a:off x="548640" y="6217920"/>
+            <a:ext cx="11064240" cy="548640"/>
           </a:xfrm>
           <a:prstGeom prst="rect">
             <a:avLst/>
@@ -3205,6 +3232,21 @@
                 </a:solidFill>
               </a:rPr>
               <a:t>Conceived, designed and built by Craig MacKenzie · Chemistry Department, Townsville Group Laboratory · Pathology Queensland</a:t>
+            </a:r>
+          </a:p>
+          <a:p>
+            <a:pPr algn="l">
+              <a:spcAft>
+                <a:spcPts val="600"/>
+              </a:spcAft>
+            </a:pPr>
+            <a:r>
+              <a:rPr sz="1000" b="0">
+                <a:solidFill>
+                  <a:srgbClr val="5F7178"/>
+                </a:solidFill>
+              </a:rPr>
+              <a:t>Amendments and oversight by Damian Juskiw · Supervising Scientist, Chemical Pathology, Townsville</a:t>
             </a:r>
           </a:p>
         </p:txBody>
@@ -3680,8 +3722,8 @@
         </p:nvSpPr>
         <p:spPr>
           <a:xfrm>
-            <a:off x="548640" y="6263640"/>
-            <a:ext cx="11064240" cy="365760"/>
+            <a:off x="548640" y="6217920"/>
+            <a:ext cx="11064240" cy="548640"/>
           </a:xfrm>
           <a:prstGeom prst="rect">
             <a:avLst/>
@@ -3706,6 +3748,21 @@
                 </a:solidFill>
               </a:rPr>
               <a:t>Conceived, designed and built by Craig MacKenzie · Chemistry Department, Townsville Group Laboratory · Pathology Queensland</a:t>
+            </a:r>
+          </a:p>
+          <a:p>
+            <a:pPr algn="l">
+              <a:spcAft>
+                <a:spcPts val="600"/>
+              </a:spcAft>
+            </a:pPr>
+            <a:r>
+              <a:rPr sz="1000" b="0">
+                <a:solidFill>
+                  <a:srgbClr val="5F7178"/>
+                </a:solidFill>
+              </a:rPr>
+              <a:t>Amendments and oversight by Damian Juskiw · Supervising Scientist, Chemical Pathology, Townsville</a:t>
             </a:r>
           </a:p>
         </p:txBody>
@@ -4114,8 +4171,8 @@
         </p:nvSpPr>
         <p:spPr>
           <a:xfrm>
-            <a:off x="548640" y="6263640"/>
-            <a:ext cx="11064240" cy="365760"/>
+            <a:off x="548640" y="6217920"/>
+            <a:ext cx="11064240" cy="548640"/>
           </a:xfrm>
           <a:prstGeom prst="rect">
             <a:avLst/>
@@ -4140,6 +4197,21 @@
                 </a:solidFill>
               </a:rPr>
               <a:t>Conceived, designed and built by Craig MacKenzie · Chemistry Department, Townsville Group Laboratory · Pathology Queensland</a:t>
+            </a:r>
+          </a:p>
+          <a:p>
+            <a:pPr algn="l">
+              <a:spcAft>
+                <a:spcPts val="600"/>
+              </a:spcAft>
+            </a:pPr>
+            <a:r>
+              <a:rPr sz="1000" b="0">
+                <a:solidFill>
+                  <a:srgbClr val="5F7178"/>
+                </a:solidFill>
+              </a:rPr>
+              <a:t>Amendments and oversight by Damian Juskiw · Supervising Scientist, Chemical Pathology, Townsville</a:t>
             </a:r>
           </a:p>
         </p:txBody>
@@ -4563,8 +4635,8 @@
         </p:nvSpPr>
         <p:spPr>
           <a:xfrm>
-            <a:off x="548640" y="6263640"/>
-            <a:ext cx="11064240" cy="365760"/>
+            <a:off x="548640" y="6217920"/>
+            <a:ext cx="11064240" cy="548640"/>
           </a:xfrm>
           <a:prstGeom prst="rect">
             <a:avLst/>
@@ -4589,6 +4661,21 @@
                 </a:solidFill>
               </a:rPr>
               <a:t>Conceived, designed and built by Craig MacKenzie · Chemistry Department, Townsville Group Laboratory · Pathology Queensland</a:t>
+            </a:r>
+          </a:p>
+          <a:p>
+            <a:pPr algn="l">
+              <a:spcAft>
+                <a:spcPts val="600"/>
+              </a:spcAft>
+            </a:pPr>
+            <a:r>
+              <a:rPr sz="1000" b="0">
+                <a:solidFill>
+                  <a:srgbClr val="5F7178"/>
+                </a:solidFill>
+              </a:rPr>
+              <a:t>Amendments and oversight by Damian Juskiw · Supervising Scientist, Chemical Pathology, Townsville</a:t>
             </a:r>
           </a:p>
         </p:txBody>
@@ -5318,8 +5405,8 @@
         </p:nvSpPr>
         <p:spPr>
           <a:xfrm>
-            <a:off x="548640" y="6263640"/>
-            <a:ext cx="11064240" cy="365760"/>
+            <a:off x="548640" y="6217920"/>
+            <a:ext cx="11064240" cy="548640"/>
           </a:xfrm>
           <a:prstGeom prst="rect">
             <a:avLst/>
@@ -5344,6 +5431,21 @@
                 </a:solidFill>
               </a:rPr>
               <a:t>Conceived, designed and built by Craig MacKenzie · Chemistry Department, Townsville Group Laboratory · Pathology Queensland</a:t>
+            </a:r>
+          </a:p>
+          <a:p>
+            <a:pPr algn="l">
+              <a:spcAft>
+                <a:spcPts val="600"/>
+              </a:spcAft>
+            </a:pPr>
+            <a:r>
+              <a:rPr sz="1000" b="0">
+                <a:solidFill>
+                  <a:srgbClr val="5F7178"/>
+                </a:solidFill>
+              </a:rPr>
+              <a:t>Amendments and oversight by Damian Juskiw · Supervising Scientist, Chemical Pathology, Townsville</a:t>
             </a:r>
           </a:p>
         </p:txBody>
@@ -6035,7 +6137,7 @@
         </p:nvSpPr>
         <p:spPr>
           <a:xfrm>
-            <a:off x="548640" y="5806440"/>
+            <a:off x="548640" y="5596128"/>
             <a:ext cx="11064240" cy="411480"/>
           </a:xfrm>
           <a:prstGeom prst="rect">
@@ -6073,8 +6175,8 @@
         </p:nvSpPr>
         <p:spPr>
           <a:xfrm>
-            <a:off x="548640" y="6263640"/>
-            <a:ext cx="11064240" cy="365760"/>
+            <a:off x="548640" y="6217920"/>
+            <a:ext cx="11064240" cy="548640"/>
           </a:xfrm>
           <a:prstGeom prst="rect">
             <a:avLst/>
@@ -6099,6 +6201,21 @@
                 </a:solidFill>
               </a:rPr>
               <a:t>Conceived, designed and built by Craig MacKenzie · Chemistry Department, Townsville Group Laboratory · Pathology Queensland</a:t>
+            </a:r>
+          </a:p>
+          <a:p>
+            <a:pPr algn="l">
+              <a:spcAft>
+                <a:spcPts val="600"/>
+              </a:spcAft>
+            </a:pPr>
+            <a:r>
+              <a:rPr sz="1000" b="0">
+                <a:solidFill>
+                  <a:srgbClr val="5F7178"/>
+                </a:solidFill>
+              </a:rPr>
+              <a:t>Amendments and oversight by Damian Juskiw · Supervising Scientist, Chemical Pathology, Townsville</a:t>
             </a:r>
           </a:p>
         </p:txBody>

--- a/PQ_Report_Generator_Overview_for_Managers_ABL.pptx
+++ b/PQ_Report_Generator_Overview_for_Managers_ABL.pptx
@@ -1214,7 +1214,7 @@
           <a:p>
             <a:pPr/>
             <a:r>
-              <a:rPr sz="1000">
+              <a:rPr sz="1100">
                 <a:solidFill>
                   <a:srgbClr val="6CCAD4"/>
                 </a:solidFill>
@@ -2725,7 +2725,7 @@
               </a:spcAft>
             </a:pPr>
             <a:r>
-              <a:rPr sz="1000" b="0">
+              <a:rPr sz="1100" b="0">
                 <a:solidFill>
                   <a:srgbClr val="5F7178"/>
                 </a:solidFill>
@@ -3241,7 +3241,7 @@
               </a:spcAft>
             </a:pPr>
             <a:r>
-              <a:rPr sz="1000" b="0">
+              <a:rPr sz="1100" b="0">
                 <a:solidFill>
                   <a:srgbClr val="5F7178"/>
                 </a:solidFill>
@@ -3757,7 +3757,7 @@
               </a:spcAft>
             </a:pPr>
             <a:r>
-              <a:rPr sz="1000" b="0">
+              <a:rPr sz="1100" b="0">
                 <a:solidFill>
                   <a:srgbClr val="5F7178"/>
                 </a:solidFill>
@@ -4206,7 +4206,7 @@
               </a:spcAft>
             </a:pPr>
             <a:r>
-              <a:rPr sz="1000" b="0">
+              <a:rPr sz="1100" b="0">
                 <a:solidFill>
                   <a:srgbClr val="5F7178"/>
                 </a:solidFill>
@@ -4670,7 +4670,7 @@
               </a:spcAft>
             </a:pPr>
             <a:r>
-              <a:rPr sz="1000" b="0">
+              <a:rPr sz="1100" b="0">
                 <a:solidFill>
                   <a:srgbClr val="5F7178"/>
                 </a:solidFill>
@@ -5440,7 +5440,7 @@
               </a:spcAft>
             </a:pPr>
             <a:r>
-              <a:rPr sz="1000" b="0">
+              <a:rPr sz="1100" b="0">
                 <a:solidFill>
                   <a:srgbClr val="5F7178"/>
                 </a:solidFill>
@@ -6210,7 +6210,7 @@
               </a:spcAft>
             </a:pPr>
             <a:r>
-              <a:rPr sz="1000" b="0">
+              <a:rPr sz="1100" b="0">
                 <a:solidFill>
                   <a:srgbClr val="5F7178"/>
                 </a:solidFill>
